--- a/1504.pptx
+++ b/1504.pptx
@@ -7,6 +7,7 @@
   <p:sldIdLst>
     <p:sldId id="256" r:id="rId2"/>
     <p:sldId id="257" r:id="rId3"/>
+    <p:sldId id="258" r:id="rId4"/>
   </p:sldIdLst>
   <p:sldSz cx="12192000" cy="6858000"/>
   <p:notesSz cx="6858000" cy="9144000"/>
@@ -105,6 +106,11 @@
       </a:defRPr>
     </a:lvl9pPr>
   </p:defaultTextStyle>
+  <p:extLst>
+    <p:ext uri="{EFAFB233-063F-42B5-8137-9DF3F51BA10A}">
+      <p15:sldGuideLst xmlns:p15="http://schemas.microsoft.com/office/powerpoint/2012/main"/>
+    </p:ext>
+  </p:extLst>
 </p:presentation>
 </file>
 
@@ -4488,6 +4494,509 @@
     <p:extLst>
       <p:ext uri="{BB962C8B-B14F-4D97-AF65-F5344CB8AC3E}">
         <p14:creationId xmlns:p14="http://schemas.microsoft.com/office/powerpoint/2010/main" val="3269074313"/>
+      </p:ext>
+    </p:extLst>
+  </p:cSld>
+  <p:clrMapOvr>
+    <a:masterClrMapping/>
+  </p:clrMapOvr>
+</p:sld>
+</file>
+
+<file path=ppt/slides/slide3.xml><?xml version="1.0" encoding="utf-8"?>
+<p:sld xmlns:a="http://schemas.openxmlformats.org/drawingml/2006/main" xmlns:r="http://schemas.openxmlformats.org/officeDocument/2006/relationships" xmlns:p="http://schemas.openxmlformats.org/presentationml/2006/main">
+  <p:cSld>
+    <p:spTree>
+      <p:nvGrpSpPr>
+        <p:cNvPr id="1" name=""/>
+        <p:cNvGrpSpPr/>
+        <p:nvPr/>
+      </p:nvGrpSpPr>
+      <p:grpSpPr>
+        <a:xfrm>
+          <a:off x="0" y="0"/>
+          <a:ext cx="0" cy="0"/>
+          <a:chOff x="0" y="0"/>
+          <a:chExt cx="0" cy="0"/>
+        </a:xfrm>
+      </p:grpSpPr>
+      <p:sp>
+        <p:nvSpPr>
+          <p:cNvPr id="4" name="CasellaDiTesto 3">
+            <a:extLst>
+              <a:ext uri="{FF2B5EF4-FFF2-40B4-BE49-F238E27FC236}">
+                <a16:creationId xmlns:a16="http://schemas.microsoft.com/office/drawing/2014/main" id="{AA2A0139-3A0A-38CC-A381-95FC07C0E5A5}"/>
+              </a:ext>
+            </a:extLst>
+          </p:cNvPr>
+          <p:cNvSpPr txBox="1"/>
+          <p:nvPr/>
+        </p:nvSpPr>
+        <p:spPr>
+          <a:xfrm>
+            <a:off x="738963" y="435935"/>
+            <a:ext cx="3965944" cy="646331"/>
+          </a:xfrm>
+          <a:prstGeom prst="rect">
+            <a:avLst/>
+          </a:prstGeom>
+          <a:noFill/>
+        </p:spPr>
+        <p:txBody>
+          <a:bodyPr wrap="square" rtlCol="0">
+            <a:spAutoFit/>
+          </a:bodyPr>
+          <a:lstStyle/>
+          <a:p>
+            <a:r>
+              <a:rPr lang="it-IT" dirty="0"/>
+              <a:t>Cicli:</a:t>
+            </a:r>
+          </a:p>
+          <a:p>
+            <a:r>
+              <a:rPr lang="it-IT" dirty="0"/>
+              <a:t>Sono ripetizioni di blocchi di codice</a:t>
+            </a:r>
+          </a:p>
+        </p:txBody>
+      </p:sp>
+      <p:sp>
+        <p:nvSpPr>
+          <p:cNvPr id="5" name="CasellaDiTesto 4">
+            <a:extLst>
+              <a:ext uri="{FF2B5EF4-FFF2-40B4-BE49-F238E27FC236}">
+                <a16:creationId xmlns:a16="http://schemas.microsoft.com/office/drawing/2014/main" id="{3350E070-101E-28AC-3D8F-962C91B58A2B}"/>
+              </a:ext>
+            </a:extLst>
+          </p:cNvPr>
+          <p:cNvSpPr txBox="1"/>
+          <p:nvPr/>
+        </p:nvSpPr>
+        <p:spPr>
+          <a:xfrm>
+            <a:off x="866553" y="2238153"/>
+            <a:ext cx="3062177" cy="923330"/>
+          </a:xfrm>
+          <a:prstGeom prst="rect">
+            <a:avLst/>
+          </a:prstGeom>
+          <a:noFill/>
+        </p:spPr>
+        <p:txBody>
+          <a:bodyPr wrap="square" rtlCol="0">
+            <a:spAutoFit/>
+          </a:bodyPr>
+          <a:lstStyle/>
+          <a:p>
+            <a:pPr marL="285750" indent="-285750">
+              <a:buFont typeface="Arial" panose="020B0604020202020204" pitchFamily="34" charset="0"/>
+              <a:buChar char="•"/>
+            </a:pPr>
+            <a:r>
+              <a:rPr lang="it-IT" dirty="0" err="1"/>
+              <a:t>While</a:t>
+            </a:r>
+            <a:endParaRPr lang="it-IT" dirty="0"/>
+          </a:p>
+          <a:p>
+            <a:pPr marL="285750" indent="-285750">
+              <a:buFont typeface="Arial" panose="020B0604020202020204" pitchFamily="34" charset="0"/>
+              <a:buChar char="•"/>
+            </a:pPr>
+            <a:r>
+              <a:rPr lang="it-IT" dirty="0"/>
+              <a:t>For(indice)</a:t>
+            </a:r>
+          </a:p>
+          <a:p>
+            <a:pPr marL="285750" indent="-285750">
+              <a:buFont typeface="Arial" panose="020B0604020202020204" pitchFamily="34" charset="0"/>
+              <a:buChar char="•"/>
+            </a:pPr>
+            <a:r>
+              <a:rPr lang="it-IT" dirty="0" err="1"/>
+              <a:t>foreach</a:t>
+            </a:r>
+            <a:endParaRPr lang="it-IT" dirty="0"/>
+          </a:p>
+        </p:txBody>
+      </p:sp>
+      <p:cxnSp>
+        <p:nvCxnSpPr>
+          <p:cNvPr id="7" name="Connettore 2 6">
+            <a:extLst>
+              <a:ext uri="{FF2B5EF4-FFF2-40B4-BE49-F238E27FC236}">
+                <a16:creationId xmlns:a16="http://schemas.microsoft.com/office/drawing/2014/main" id="{0125107B-4587-E1CA-603A-63F783CEBE79}"/>
+              </a:ext>
+            </a:extLst>
+          </p:cNvPr>
+          <p:cNvCxnSpPr/>
+          <p:nvPr/>
+        </p:nvCxnSpPr>
+        <p:spPr>
+          <a:xfrm flipV="1">
+            <a:off x="2041451" y="1951074"/>
+            <a:ext cx="4816549" cy="489098"/>
+          </a:xfrm>
+          <a:prstGeom prst="straightConnector1">
+            <a:avLst/>
+          </a:prstGeom>
+          <a:ln>
+            <a:tailEnd type="triangle"/>
+          </a:ln>
+        </p:spPr>
+        <p:style>
+          <a:lnRef idx="2">
+            <a:schemeClr val="accent1"/>
+          </a:lnRef>
+          <a:fillRef idx="0">
+            <a:schemeClr val="accent1"/>
+          </a:fillRef>
+          <a:effectRef idx="1">
+            <a:schemeClr val="accent1"/>
+          </a:effectRef>
+          <a:fontRef idx="minor">
+            <a:schemeClr val="tx1"/>
+          </a:fontRef>
+        </p:style>
+      </p:cxnSp>
+      <p:sp>
+        <p:nvSpPr>
+          <p:cNvPr id="8" name="CasellaDiTesto 7">
+            <a:extLst>
+              <a:ext uri="{FF2B5EF4-FFF2-40B4-BE49-F238E27FC236}">
+                <a16:creationId xmlns:a16="http://schemas.microsoft.com/office/drawing/2014/main" id="{5DCBEB53-62DA-4CF8-7DBB-DF617F01C1A1}"/>
+              </a:ext>
+            </a:extLst>
+          </p:cNvPr>
+          <p:cNvSpPr txBox="1"/>
+          <p:nvPr/>
+        </p:nvSpPr>
+        <p:spPr>
+          <a:xfrm>
+            <a:off x="7054702" y="1770321"/>
+            <a:ext cx="3152554" cy="1477328"/>
+          </a:xfrm>
+          <a:prstGeom prst="rect">
+            <a:avLst/>
+          </a:prstGeom>
+          <a:noFill/>
+        </p:spPr>
+        <p:txBody>
+          <a:bodyPr wrap="square" rtlCol="0">
+            <a:spAutoFit/>
+          </a:bodyPr>
+          <a:lstStyle/>
+          <a:p>
+            <a:r>
+              <a:rPr lang="it-IT" dirty="0" err="1"/>
+              <a:t>While</a:t>
+            </a:r>
+            <a:r>
+              <a:rPr lang="it-IT" dirty="0"/>
+              <a:t>( condizione/i ){</a:t>
+            </a:r>
+          </a:p>
+          <a:p>
+            <a:r>
+              <a:rPr lang="it-IT" dirty="0"/>
+              <a:t>	---</a:t>
+            </a:r>
+          </a:p>
+          <a:p>
+            <a:r>
+              <a:rPr lang="it-IT" dirty="0"/>
+              <a:t>	---</a:t>
+            </a:r>
+          </a:p>
+          <a:p>
+            <a:r>
+              <a:rPr lang="it-IT" dirty="0"/>
+              <a:t>	---</a:t>
+            </a:r>
+          </a:p>
+          <a:p>
+            <a:r>
+              <a:rPr lang="it-IT" dirty="0"/>
+              <a:t>}</a:t>
+            </a:r>
+          </a:p>
+        </p:txBody>
+      </p:sp>
+      <p:cxnSp>
+        <p:nvCxnSpPr>
+          <p:cNvPr id="10" name="Connettore 2 9">
+            <a:extLst>
+              <a:ext uri="{FF2B5EF4-FFF2-40B4-BE49-F238E27FC236}">
+                <a16:creationId xmlns:a16="http://schemas.microsoft.com/office/drawing/2014/main" id="{0C2601B5-4C28-4485-1440-96CA7F2DFCC5}"/>
+              </a:ext>
+            </a:extLst>
+          </p:cNvPr>
+          <p:cNvCxnSpPr>
+            <a:cxnSpLocks/>
+            <a:endCxn id="11" idx="1"/>
+          </p:cNvCxnSpPr>
+          <p:nvPr/>
+        </p:nvCxnSpPr>
+        <p:spPr>
+          <a:xfrm>
+            <a:off x="7783033" y="2509284"/>
+            <a:ext cx="1307804" cy="1495681"/>
+          </a:xfrm>
+          <a:prstGeom prst="straightConnector1">
+            <a:avLst/>
+          </a:prstGeom>
+          <a:ln>
+            <a:tailEnd type="triangle"/>
+          </a:ln>
+        </p:spPr>
+        <p:style>
+          <a:lnRef idx="2">
+            <a:schemeClr val="accent1"/>
+          </a:lnRef>
+          <a:fillRef idx="0">
+            <a:schemeClr val="accent1"/>
+          </a:fillRef>
+          <a:effectRef idx="1">
+            <a:schemeClr val="accent1"/>
+          </a:effectRef>
+          <a:fontRef idx="minor">
+            <a:schemeClr val="tx1"/>
+          </a:fontRef>
+        </p:style>
+      </p:cxnSp>
+      <p:sp>
+        <p:nvSpPr>
+          <p:cNvPr id="11" name="CasellaDiTesto 10">
+            <a:extLst>
+              <a:ext uri="{FF2B5EF4-FFF2-40B4-BE49-F238E27FC236}">
+                <a16:creationId xmlns:a16="http://schemas.microsoft.com/office/drawing/2014/main" id="{69903D55-9D18-573F-D2F7-C452AE7B231C}"/>
+              </a:ext>
+            </a:extLst>
+          </p:cNvPr>
+          <p:cNvSpPr txBox="1"/>
+          <p:nvPr/>
+        </p:nvSpPr>
+        <p:spPr>
+          <a:xfrm>
+            <a:off x="9090837" y="3543300"/>
+            <a:ext cx="2546498" cy="923330"/>
+          </a:xfrm>
+          <a:prstGeom prst="rect">
+            <a:avLst/>
+          </a:prstGeom>
+          <a:noFill/>
+        </p:spPr>
+        <p:txBody>
+          <a:bodyPr wrap="square" rtlCol="0">
+            <a:spAutoFit/>
+          </a:bodyPr>
+          <a:lstStyle/>
+          <a:p>
+            <a:r>
+              <a:rPr lang="it-IT" dirty="0"/>
+              <a:t>La condizione/i </a:t>
+            </a:r>
+            <a:r>
+              <a:rPr lang="it-IT" b="1" dirty="0"/>
+              <a:t>DEVONO</a:t>
+            </a:r>
+            <a:r>
+              <a:rPr lang="it-IT" dirty="0"/>
+              <a:t> diventare false</a:t>
+            </a:r>
+          </a:p>
+        </p:txBody>
+      </p:sp>
+      <p:cxnSp>
+        <p:nvCxnSpPr>
+          <p:cNvPr id="13" name="Connettore 2 12">
+            <a:extLst>
+              <a:ext uri="{FF2B5EF4-FFF2-40B4-BE49-F238E27FC236}">
+                <a16:creationId xmlns:a16="http://schemas.microsoft.com/office/drawing/2014/main" id="{A14C5B98-0273-06B7-45EB-B80FE3EC0018}"/>
+              </a:ext>
+            </a:extLst>
+          </p:cNvPr>
+          <p:cNvCxnSpPr/>
+          <p:nvPr/>
+        </p:nvCxnSpPr>
+        <p:spPr>
+          <a:xfrm>
+            <a:off x="2387009" y="2769781"/>
+            <a:ext cx="2993065" cy="2470368"/>
+          </a:xfrm>
+          <a:prstGeom prst="straightConnector1">
+            <a:avLst/>
+          </a:prstGeom>
+          <a:ln>
+            <a:tailEnd type="triangle"/>
+          </a:ln>
+        </p:spPr>
+        <p:style>
+          <a:lnRef idx="2">
+            <a:schemeClr val="accent1"/>
+          </a:lnRef>
+          <a:fillRef idx="0">
+            <a:schemeClr val="accent1"/>
+          </a:fillRef>
+          <a:effectRef idx="1">
+            <a:schemeClr val="accent1"/>
+          </a:effectRef>
+          <a:fontRef idx="minor">
+            <a:schemeClr val="tx1"/>
+          </a:fontRef>
+        </p:style>
+      </p:cxnSp>
+      <p:sp>
+        <p:nvSpPr>
+          <p:cNvPr id="14" name="CasellaDiTesto 13">
+            <a:extLst>
+              <a:ext uri="{FF2B5EF4-FFF2-40B4-BE49-F238E27FC236}">
+                <a16:creationId xmlns:a16="http://schemas.microsoft.com/office/drawing/2014/main" id="{9665EE21-226A-E27C-0FAD-480E0FA21769}"/>
+              </a:ext>
+            </a:extLst>
+          </p:cNvPr>
+          <p:cNvSpPr txBox="1"/>
+          <p:nvPr/>
+        </p:nvSpPr>
+        <p:spPr>
+          <a:xfrm>
+            <a:off x="9510823" y="1706526"/>
+            <a:ext cx="2126512" cy="1200329"/>
+          </a:xfrm>
+          <a:prstGeom prst="rect">
+            <a:avLst/>
+          </a:prstGeom>
+          <a:noFill/>
+        </p:spPr>
+        <p:txBody>
+          <a:bodyPr wrap="square" rtlCol="0">
+            <a:spAutoFit/>
+          </a:bodyPr>
+          <a:lstStyle/>
+          <a:p>
+            <a:r>
+              <a:rPr lang="it-IT" dirty="0"/>
+              <a:t>Ripeto le istruzioni in base alla veridicità della/e condizioni</a:t>
+            </a:r>
+          </a:p>
+        </p:txBody>
+      </p:sp>
+      <p:sp>
+        <p:nvSpPr>
+          <p:cNvPr id="15" name="CasellaDiTesto 14">
+            <a:extLst>
+              <a:ext uri="{FF2B5EF4-FFF2-40B4-BE49-F238E27FC236}">
+                <a16:creationId xmlns:a16="http://schemas.microsoft.com/office/drawing/2014/main" id="{69B53FBF-B58E-D2BA-AEF3-C41F6E8F4649}"/>
+              </a:ext>
+            </a:extLst>
+          </p:cNvPr>
+          <p:cNvSpPr txBox="1"/>
+          <p:nvPr/>
+        </p:nvSpPr>
+        <p:spPr>
+          <a:xfrm>
+            <a:off x="2068033" y="5172740"/>
+            <a:ext cx="3264195" cy="646331"/>
+          </a:xfrm>
+          <a:prstGeom prst="rect">
+            <a:avLst/>
+          </a:prstGeom>
+          <a:noFill/>
+        </p:spPr>
+        <p:txBody>
+          <a:bodyPr wrap="square" rtlCol="0">
+            <a:spAutoFit/>
+          </a:bodyPr>
+          <a:lstStyle/>
+          <a:p>
+            <a:r>
+              <a:rPr lang="it-IT" dirty="0"/>
+              <a:t>Ripete il blocco di codice, un numero BEN DEFINITO di volte</a:t>
+            </a:r>
+          </a:p>
+        </p:txBody>
+      </p:sp>
+      <p:sp>
+        <p:nvSpPr>
+          <p:cNvPr id="16" name="CasellaDiTesto 15">
+            <a:extLst>
+              <a:ext uri="{FF2B5EF4-FFF2-40B4-BE49-F238E27FC236}">
+                <a16:creationId xmlns:a16="http://schemas.microsoft.com/office/drawing/2014/main" id="{0EACCDE3-82F6-E2D9-63C3-2B01A0AD09A1}"/>
+              </a:ext>
+            </a:extLst>
+          </p:cNvPr>
+          <p:cNvSpPr txBox="1"/>
+          <p:nvPr/>
+        </p:nvSpPr>
+        <p:spPr>
+          <a:xfrm>
+            <a:off x="5502349" y="5103628"/>
+            <a:ext cx="5794744" cy="1477328"/>
+          </a:xfrm>
+          <a:prstGeom prst="rect">
+            <a:avLst/>
+          </a:prstGeom>
+          <a:noFill/>
+        </p:spPr>
+        <p:txBody>
+          <a:bodyPr wrap="square" rtlCol="0">
+            <a:spAutoFit/>
+          </a:bodyPr>
+          <a:lstStyle/>
+          <a:p>
+            <a:r>
+              <a:rPr lang="it-IT" dirty="0"/>
+              <a:t>For (</a:t>
+            </a:r>
+            <a:r>
+              <a:rPr lang="it-IT" dirty="0" err="1"/>
+              <a:t>int</a:t>
+            </a:r>
+            <a:r>
+              <a:rPr lang="it-IT" dirty="0"/>
+              <a:t> indice =partenza; indice &lt;</a:t>
+            </a:r>
+            <a:r>
+              <a:rPr lang="it-IT" dirty="0" err="1"/>
+              <a:t>arrivo;indice</a:t>
+            </a:r>
+            <a:r>
+              <a:rPr lang="it-IT" dirty="0"/>
+              <a:t>++){</a:t>
+            </a:r>
+          </a:p>
+          <a:p>
+            <a:r>
+              <a:rPr lang="it-IT" dirty="0"/>
+              <a:t>	---</a:t>
+            </a:r>
+          </a:p>
+          <a:p>
+            <a:r>
+              <a:rPr lang="it-IT" dirty="0"/>
+              <a:t>	---</a:t>
+            </a:r>
+          </a:p>
+          <a:p>
+            <a:r>
+              <a:rPr lang="it-IT" dirty="0"/>
+              <a:t>	---</a:t>
+            </a:r>
+          </a:p>
+          <a:p>
+            <a:r>
+              <a:rPr lang="it-IT" dirty="0"/>
+              <a:t>}</a:t>
+            </a:r>
+          </a:p>
+        </p:txBody>
+      </p:sp>
+    </p:spTree>
+    <p:extLst>
+      <p:ext uri="{BB962C8B-B14F-4D97-AF65-F5344CB8AC3E}">
+        <p14:creationId xmlns:p14="http://schemas.microsoft.com/office/powerpoint/2010/main" val="1257830583"/>
       </p:ext>
     </p:extLst>
   </p:cSld>
